--- a/images/contact.pptx
+++ b/images/contact.pptx
@@ -3333,10 +3333,10 @@
       </p:grpSpPr>
       <p:pic>
         <p:nvPicPr>
-          <p:cNvPr id="8" name="Graphic 7">
+          <p:cNvPr id="14" name="Graphic 13" descr="Cursor with solid fill">
             <a:extLst>
               <a:ext uri="{FF2B5EF4-FFF2-40B4-BE49-F238E27FC236}">
-                <a16:creationId xmlns:a16="http://schemas.microsoft.com/office/drawing/2014/main" id="{027E9235-A349-4136-043F-3AF4C1EAB105}"/>
+                <a16:creationId xmlns:a16="http://schemas.microsoft.com/office/drawing/2014/main" id="{85E3D3E2-B8FE-0B9E-3324-64DED503B939}"/>
               </a:ext>
             </a:extLst>
           </p:cNvPr>
@@ -3353,13 +3353,14 @@
               </a:ext>
             </a:extLst>
           </a:blip>
-          <a:srcRect/>
-          <a:stretch/>
+          <a:stretch>
+            <a:fillRect/>
+          </a:stretch>
         </p:blipFill>
         <p:spPr>
           <a:xfrm>
-            <a:off x="2398014" y="400050"/>
-            <a:ext cx="2404872" cy="2404872"/>
+            <a:off x="6001893" y="1597914"/>
+            <a:ext cx="914400" cy="914400"/>
           </a:xfrm>
           <a:prstGeom prst="rect">
             <a:avLst/>
@@ -3368,10 +3369,10 @@
       </p:pic>
       <p:pic>
         <p:nvPicPr>
-          <p:cNvPr id="10" name="Graphic 9">
+          <p:cNvPr id="17" name="Graphic 16">
             <a:extLst>
               <a:ext uri="{FF2B5EF4-FFF2-40B4-BE49-F238E27FC236}">
-                <a16:creationId xmlns:a16="http://schemas.microsoft.com/office/drawing/2014/main" id="{97D0567A-41C7-A16F-B51C-B0C63859DB30}"/>
+                <a16:creationId xmlns:a16="http://schemas.microsoft.com/office/drawing/2014/main" id="{B41B2D1A-EBDE-757E-A796-C63AEA56B57D}"/>
               </a:ext>
             </a:extLst>
           </p:cNvPr>
@@ -3393,8 +3394,8 @@
         </p:blipFill>
         <p:spPr>
           <a:xfrm>
-            <a:off x="7199757" y="395478"/>
-            <a:ext cx="2404872" cy="2404872"/>
+            <a:off x="282321" y="683514"/>
+            <a:ext cx="1828800" cy="1828800"/>
           </a:xfrm>
           <a:prstGeom prst="rect">
             <a:avLst/>
@@ -3403,10 +3404,10 @@
       </p:pic>
       <p:pic>
         <p:nvPicPr>
-          <p:cNvPr id="23" name="Graphic 22">
+          <p:cNvPr id="18" name="Graphic 17">
             <a:extLst>
               <a:ext uri="{FF2B5EF4-FFF2-40B4-BE49-F238E27FC236}">
-                <a16:creationId xmlns:a16="http://schemas.microsoft.com/office/drawing/2014/main" id="{1B5AF52C-AF9D-E98C-E591-4CF262FF400C}"/>
+                <a16:creationId xmlns:a16="http://schemas.microsoft.com/office/drawing/2014/main" id="{F556D688-1D97-4B8F-DD89-D19EDC7D0C75}"/>
               </a:ext>
             </a:extLst>
           </p:cNvPr>
@@ -3428,8 +3429,8 @@
         </p:blipFill>
         <p:spPr>
           <a:xfrm>
-            <a:off x="4798314" y="397764"/>
-            <a:ext cx="2404872" cy="2404872"/>
+            <a:off x="2686050" y="683514"/>
+            <a:ext cx="1828800" cy="1828800"/>
           </a:xfrm>
           <a:prstGeom prst="rect">
             <a:avLst/>
@@ -3438,10 +3439,10 @@
       </p:pic>
       <p:pic>
         <p:nvPicPr>
-          <p:cNvPr id="25" name="Graphic 24">
+          <p:cNvPr id="19" name="Graphic 18">
             <a:extLst>
               <a:ext uri="{FF2B5EF4-FFF2-40B4-BE49-F238E27FC236}">
-                <a16:creationId xmlns:a16="http://schemas.microsoft.com/office/drawing/2014/main" id="{7BEA8E55-BC7A-F674-B154-66C5583C12E7}"/>
+                <a16:creationId xmlns:a16="http://schemas.microsoft.com/office/drawing/2014/main" id="{0670138C-9269-2575-3405-A84A2F7B451E}"/>
               </a:ext>
             </a:extLst>
           </p:cNvPr>
@@ -3463,8 +3464,8 @@
         </p:blipFill>
         <p:spPr>
           <a:xfrm>
-            <a:off x="-9144" y="395478"/>
-            <a:ext cx="2404872" cy="2404872"/>
+            <a:off x="5087493" y="643149"/>
+            <a:ext cx="1828800" cy="1828800"/>
           </a:xfrm>
           <a:prstGeom prst="rect">
             <a:avLst/>
@@ -3473,10 +3474,10 @@
       </p:pic>
       <p:pic>
         <p:nvPicPr>
-          <p:cNvPr id="14" name="Graphic 13" descr="Cursor with solid fill">
+          <p:cNvPr id="20" name="Graphic 19">
             <a:extLst>
               <a:ext uri="{FF2B5EF4-FFF2-40B4-BE49-F238E27FC236}">
-                <a16:creationId xmlns:a16="http://schemas.microsoft.com/office/drawing/2014/main" id="{85E3D3E2-B8FE-0B9E-3324-64DED503B939}"/>
+                <a16:creationId xmlns:a16="http://schemas.microsoft.com/office/drawing/2014/main" id="{38ABFD92-B20F-1F01-45D3-55AAC94F6270}"/>
               </a:ext>
             </a:extLst>
           </p:cNvPr>
@@ -3493,14 +3494,13 @@
               </a:ext>
             </a:extLst>
           </a:blip>
-          <a:stretch>
-            <a:fillRect/>
-          </a:stretch>
+          <a:srcRect/>
+          <a:stretch/>
         </p:blipFill>
         <p:spPr>
           <a:xfrm>
-            <a:off x="5947050" y="1557549"/>
-            <a:ext cx="1336476" cy="1336476"/>
+            <a:off x="7488936" y="643149"/>
+            <a:ext cx="1828800" cy="1828800"/>
           </a:xfrm>
           <a:prstGeom prst="rect">
             <a:avLst/>

--- a/images/contact.pptx
+++ b/images/contact.pptx
@@ -197,7 +197,7 @@
           <a:p>
             <a:fld id="{B1913588-C2C1-4AB8-9F0D-04EC72C1EC15}" type="datetimeFigureOut">
               <a:rPr lang="en-US" smtClean="0"/>
-              <a:t>4/7/2026</a:t>
+              <a:t>4/8/2026</a:t>
             </a:fld>
             <a:endParaRPr lang="en-US"/>
           </a:p>
@@ -595,7 +595,7 @@
           <a:p>
             <a:fld id="{B8700A39-06E1-486D-9C71-A159ABBEACA4}" type="datetimeFigureOut">
               <a:rPr lang="en-US" smtClean="0"/>
-              <a:t>4/7/2026</a:t>
+              <a:t>4/8/2026</a:t>
             </a:fld>
             <a:endParaRPr lang="en-US"/>
           </a:p>
@@ -765,7 +765,7 @@
           <a:p>
             <a:fld id="{B8700A39-06E1-486D-9C71-A159ABBEACA4}" type="datetimeFigureOut">
               <a:rPr lang="en-US" smtClean="0"/>
-              <a:t>4/7/2026</a:t>
+              <a:t>4/8/2026</a:t>
             </a:fld>
             <a:endParaRPr lang="en-US"/>
           </a:p>
@@ -945,7 +945,7 @@
           <a:p>
             <a:fld id="{B8700A39-06E1-486D-9C71-A159ABBEACA4}" type="datetimeFigureOut">
               <a:rPr lang="en-US" smtClean="0"/>
-              <a:t>4/7/2026</a:t>
+              <a:t>4/8/2026</a:t>
             </a:fld>
             <a:endParaRPr lang="en-US"/>
           </a:p>
@@ -1115,7 +1115,7 @@
           <a:p>
             <a:fld id="{B8700A39-06E1-486D-9C71-A159ABBEACA4}" type="datetimeFigureOut">
               <a:rPr lang="en-US" smtClean="0"/>
-              <a:t>4/7/2026</a:t>
+              <a:t>4/8/2026</a:t>
             </a:fld>
             <a:endParaRPr lang="en-US"/>
           </a:p>
@@ -1361,7 +1361,7 @@
           <a:p>
             <a:fld id="{B8700A39-06E1-486D-9C71-A159ABBEACA4}" type="datetimeFigureOut">
               <a:rPr lang="en-US" smtClean="0"/>
-              <a:t>4/7/2026</a:t>
+              <a:t>4/8/2026</a:t>
             </a:fld>
             <a:endParaRPr lang="en-US"/>
           </a:p>
@@ -1593,7 +1593,7 @@
           <a:p>
             <a:fld id="{B8700A39-06E1-486D-9C71-A159ABBEACA4}" type="datetimeFigureOut">
               <a:rPr lang="en-US" smtClean="0"/>
-              <a:t>4/7/2026</a:t>
+              <a:t>4/8/2026</a:t>
             </a:fld>
             <a:endParaRPr lang="en-US"/>
           </a:p>
@@ -1960,7 +1960,7 @@
           <a:p>
             <a:fld id="{B8700A39-06E1-486D-9C71-A159ABBEACA4}" type="datetimeFigureOut">
               <a:rPr lang="en-US" smtClean="0"/>
-              <a:t>4/7/2026</a:t>
+              <a:t>4/8/2026</a:t>
             </a:fld>
             <a:endParaRPr lang="en-US"/>
           </a:p>
@@ -2078,7 +2078,7 @@
           <a:p>
             <a:fld id="{B8700A39-06E1-486D-9C71-A159ABBEACA4}" type="datetimeFigureOut">
               <a:rPr lang="en-US" smtClean="0"/>
-              <a:t>4/7/2026</a:t>
+              <a:t>4/8/2026</a:t>
             </a:fld>
             <a:endParaRPr lang="en-US"/>
           </a:p>
@@ -2173,7 +2173,7 @@
           <a:p>
             <a:fld id="{B8700A39-06E1-486D-9C71-A159ABBEACA4}" type="datetimeFigureOut">
               <a:rPr lang="en-US" smtClean="0"/>
-              <a:t>4/7/2026</a:t>
+              <a:t>4/8/2026</a:t>
             </a:fld>
             <a:endParaRPr lang="en-US"/>
           </a:p>
@@ -2450,7 +2450,7 @@
           <a:p>
             <a:fld id="{B8700A39-06E1-486D-9C71-A159ABBEACA4}" type="datetimeFigureOut">
               <a:rPr lang="en-US" smtClean="0"/>
-              <a:t>4/7/2026</a:t>
+              <a:t>4/8/2026</a:t>
             </a:fld>
             <a:endParaRPr lang="en-US"/>
           </a:p>
@@ -2707,7 +2707,7 @@
           <a:p>
             <a:fld id="{B8700A39-06E1-486D-9C71-A159ABBEACA4}" type="datetimeFigureOut">
               <a:rPr lang="en-US" smtClean="0"/>
-              <a:t>4/7/2026</a:t>
+              <a:t>4/8/2026</a:t>
             </a:fld>
             <a:endParaRPr lang="en-US"/>
           </a:p>
@@ -2920,7 +2920,7 @@
           <a:p>
             <a:fld id="{B8700A39-06E1-486D-9C71-A159ABBEACA4}" type="datetimeFigureOut">
               <a:rPr lang="en-US" smtClean="0"/>
-              <a:t>4/7/2026</a:t>
+              <a:t>4/8/2026</a:t>
             </a:fld>
             <a:endParaRPr lang="en-US"/>
           </a:p>
@@ -3333,10 +3333,10 @@
       </p:grpSpPr>
       <p:pic>
         <p:nvPicPr>
-          <p:cNvPr id="14" name="Graphic 13" descr="Cursor with solid fill">
+          <p:cNvPr id="18" name="Graphic 17">
             <a:extLst>
               <a:ext uri="{FF2B5EF4-FFF2-40B4-BE49-F238E27FC236}">
-                <a16:creationId xmlns:a16="http://schemas.microsoft.com/office/drawing/2014/main" id="{85E3D3E2-B8FE-0B9E-3324-64DED503B939}"/>
+                <a16:creationId xmlns:a16="http://schemas.microsoft.com/office/drawing/2014/main" id="{F556D688-1D97-4B8F-DD89-D19EDC7D0C75}"/>
               </a:ext>
             </a:extLst>
           </p:cNvPr>
@@ -3353,14 +3353,13 @@
               </a:ext>
             </a:extLst>
           </a:blip>
-          <a:stretch>
-            <a:fillRect/>
-          </a:stretch>
+          <a:srcRect/>
+          <a:stretch/>
         </p:blipFill>
         <p:spPr>
           <a:xfrm>
-            <a:off x="6001893" y="1597914"/>
-            <a:ext cx="914400" cy="914400"/>
+            <a:off x="3886200" y="685800"/>
+            <a:ext cx="1828800" cy="1828800"/>
           </a:xfrm>
           <a:prstGeom prst="rect">
             <a:avLst/>
@@ -3369,10 +3368,10 @@
       </p:pic>
       <p:pic>
         <p:nvPicPr>
-          <p:cNvPr id="17" name="Graphic 16">
+          <p:cNvPr id="2" name="Graphic 1" descr="Cursor with solid fill">
             <a:extLst>
               <a:ext uri="{FF2B5EF4-FFF2-40B4-BE49-F238E27FC236}">
-                <a16:creationId xmlns:a16="http://schemas.microsoft.com/office/drawing/2014/main" id="{B41B2D1A-EBDE-757E-A796-C63AEA56B57D}"/>
+                <a16:creationId xmlns:a16="http://schemas.microsoft.com/office/drawing/2014/main" id="{85E3D3E2-B8FE-0B9E-3324-64DED503B939}"/>
               </a:ext>
             </a:extLst>
           </p:cNvPr>
@@ -3389,13 +3388,14 @@
               </a:ext>
             </a:extLst>
           </a:blip>
-          <a:srcRect/>
-          <a:stretch/>
+          <a:stretch>
+            <a:fillRect/>
+          </a:stretch>
         </p:blipFill>
         <p:spPr>
           <a:xfrm>
-            <a:off x="282321" y="683514"/>
-            <a:ext cx="1828800" cy="1828800"/>
+            <a:off x="1906739" y="1634490"/>
+            <a:ext cx="877824" cy="877824"/>
           </a:xfrm>
           <a:prstGeom prst="rect">
             <a:avLst/>
@@ -3404,10 +3404,10 @@
       </p:pic>
       <p:pic>
         <p:nvPicPr>
-          <p:cNvPr id="18" name="Graphic 17">
+          <p:cNvPr id="3" name="Graphic 2">
             <a:extLst>
               <a:ext uri="{FF2B5EF4-FFF2-40B4-BE49-F238E27FC236}">
-                <a16:creationId xmlns:a16="http://schemas.microsoft.com/office/drawing/2014/main" id="{F556D688-1D97-4B8F-DD89-D19EDC7D0C75}"/>
+                <a16:creationId xmlns:a16="http://schemas.microsoft.com/office/drawing/2014/main" id="{0670138C-9269-2575-3405-A84A2F7B451E}"/>
               </a:ext>
             </a:extLst>
           </p:cNvPr>
@@ -3429,7 +3429,7 @@
         </p:blipFill>
         <p:spPr>
           <a:xfrm>
-            <a:off x="2686050" y="683514"/>
+            <a:off x="955763" y="683514"/>
             <a:ext cx="1828800" cy="1828800"/>
           </a:xfrm>
           <a:prstGeom prst="rect">
@@ -3439,10 +3439,10 @@
       </p:pic>
       <p:pic>
         <p:nvPicPr>
-          <p:cNvPr id="19" name="Graphic 18">
+          <p:cNvPr id="4" name="Graphic 3">
             <a:extLst>
               <a:ext uri="{FF2B5EF4-FFF2-40B4-BE49-F238E27FC236}">
-                <a16:creationId xmlns:a16="http://schemas.microsoft.com/office/drawing/2014/main" id="{0670138C-9269-2575-3405-A84A2F7B451E}"/>
+                <a16:creationId xmlns:a16="http://schemas.microsoft.com/office/drawing/2014/main" id="{84C9470D-198E-B688-9A41-4D693721451B}"/>
               </a:ext>
             </a:extLst>
           </p:cNvPr>
@@ -3464,42 +3464,7 @@
         </p:blipFill>
         <p:spPr>
           <a:xfrm>
-            <a:off x="5087493" y="643149"/>
-            <a:ext cx="1828800" cy="1828800"/>
-          </a:xfrm>
-          <a:prstGeom prst="rect">
-            <a:avLst/>
-          </a:prstGeom>
-        </p:spPr>
-      </p:pic>
-      <p:pic>
-        <p:nvPicPr>
-          <p:cNvPr id="20" name="Graphic 19">
-            <a:extLst>
-              <a:ext uri="{FF2B5EF4-FFF2-40B4-BE49-F238E27FC236}">
-                <a16:creationId xmlns:a16="http://schemas.microsoft.com/office/drawing/2014/main" id="{38ABFD92-B20F-1F01-45D3-55AAC94F6270}"/>
-              </a:ext>
-            </a:extLst>
-          </p:cNvPr>
-          <p:cNvPicPr>
-            <a:picLocks noChangeAspect="1"/>
-          </p:cNvPicPr>
-          <p:nvPr/>
-        </p:nvPicPr>
-        <p:blipFill>
-          <a:blip>
-            <a:extLst>
-              <a:ext uri="{96DAC541-7B7A-43D3-8B79-37D633B846F1}">
-                <asvg:svgBlip xmlns:asvg="http://schemas.microsoft.com/office/drawing/2016/SVG/main" r:embed="rId6"/>
-              </a:ext>
-            </a:extLst>
-          </a:blip>
-          <a:srcRect/>
-          <a:stretch/>
-        </p:blipFill>
-        <p:spPr>
-          <a:xfrm>
-            <a:off x="7488936" y="643149"/>
+            <a:off x="6816637" y="683514"/>
             <a:ext cx="1828800" cy="1828800"/>
           </a:xfrm>
           <a:prstGeom prst="rect">
